--- a/public/fun/cards/public/public-47.pptx
+++ b/public/fun/cards/public/public-47.pptx
@@ -3085,7 +3085,7 @@
     <p:bg>
       <p:bgPr>
         <a:solidFill>
-          <a:srgbClr val="F8F4F1"/>
+          <a:srgbClr val="FFFFFF"/>
         </a:solidFill>
         <a:effectLst/>
       </p:bgPr>
@@ -3099,341 +3099,14 @@
       <p:grpSpPr/>
       <p:sp>
         <p:nvSpPr>
-          <p:cNvPr id="2" name="Rectangle 1"/>
+          <p:cNvPr id="2" name="Freeform 1"/>
           <p:cNvSpPr/>
           <p:nvPr/>
         </p:nvSpPr>
         <p:spPr>
           <a:xfrm>
-            <a:off x="93600" y="93600"/>
-            <a:ext cx="3052800" cy="1612800"/>
-          </a:xfrm>
-          <a:prstGeom prst="rect">
-            <a:avLst/>
-          </a:prstGeom>
-          <a:noFill/>
-          <a:ln w="10800">
-            <a:solidFill>
-              <a:srgbClr val="765037"/>
-            </a:solidFill>
-          </a:ln>
-        </p:spPr>
-        <p:txBody>
-          <a:bodyPr rtlCol="0" anchor="ctr"/>
-          <a:lstStyle/>
-          <a:p>
-            <a:pPr algn="ctr"/>
-          </a:p>
-        </p:txBody>
-      </p:sp>
-      <p:sp>
-        <p:nvSpPr>
-          <p:cNvPr id="3" name="Rectangle 2"/>
-          <p:cNvSpPr/>
-          <p:nvPr/>
-        </p:nvSpPr>
-        <p:spPr>
-          <a:xfrm>
-            <a:off x="144000" y="144000"/>
-            <a:ext cx="2952000" cy="1512000"/>
-          </a:xfrm>
-          <a:prstGeom prst="rect">
-            <a:avLst/>
-          </a:prstGeom>
-          <a:noFill/>
-          <a:ln w="5400">
-            <a:solidFill>
-              <a:srgbClr val="F2E8E1"/>
-            </a:solidFill>
-          </a:ln>
-        </p:spPr>
-        <p:txBody>
-          <a:bodyPr rtlCol="0" anchor="ctr"/>
-          <a:lstStyle/>
-          <a:p>
-            <a:pPr algn="ctr"/>
-          </a:p>
-        </p:txBody>
-      </p:sp>
-      <p:sp>
-        <p:nvSpPr>
-          <p:cNvPr id="4" name="텍스트"/>
-          <p:cNvSpPr txBox="1"/>
-          <p:nvPr/>
-        </p:nvSpPr>
-        <p:spPr>
-          <a:xfrm>
-            <a:off x="360000" y="280800"/>
-            <a:ext cx="2520000" cy="100800"/>
-          </a:xfrm>
-          <a:prstGeom prst="rect">
-            <a:avLst/>
-          </a:prstGeom>
-          <a:noFill/>
-        </p:spPr>
-        <p:txBody>
-          <a:bodyPr wrap="square" lIns="0" rIns="0" tIns="0" bIns="0" anchor="t">
-            <a:spAutoFit/>
-          </a:bodyPr>
-          <a:lstStyle/>
-          <a:p>
-            <a:pPr algn="ctr">
-              <a:lnSpc>
-                <a:spcPts val="1015"/>
-              </a:lnSpc>
-            </a:pPr>
-            <a:r>
-              <a:rPr sz="700" b="1" spc="400">
-                <a:solidFill>
-                  <a:srgbClr val="7B6E65"/>
-                </a:solidFill>
-                <a:latin typeface="맑은 고딕"/>
-                <a:ea typeface="맑은 고딕"/>
-              </a:rPr>
-              <a:t>기관명 · 부서명</a:t>
-            </a:r>
-          </a:p>
-        </p:txBody>
-      </p:sp>
-      <p:sp>
-        <p:nvSpPr>
-          <p:cNvPr id="5" name="텍스트"/>
-          <p:cNvSpPr txBox="1"/>
-          <p:nvPr/>
-        </p:nvSpPr>
-        <p:spPr>
-          <a:xfrm>
-            <a:off x="360000" y="468000"/>
-            <a:ext cx="2520000" cy="313692"/>
-          </a:xfrm>
-          <a:prstGeom prst="rect">
-            <a:avLst/>
-          </a:prstGeom>
-          <a:noFill/>
-        </p:spPr>
-        <p:txBody>
-          <a:bodyPr wrap="square" lIns="0" rIns="0" tIns="0" bIns="0" anchor="t">
-            <a:spAutoFit/>
-          </a:bodyPr>
-          <a:lstStyle/>
-          <a:p>
-            <a:pPr algn="ctr">
-              <a:lnSpc>
-                <a:spcPts val="2755"/>
-              </a:lnSpc>
-            </a:pPr>
-            <a:r>
-              <a:rPr sz="1900" b="1" spc="50">
-                <a:solidFill>
-                  <a:srgbClr val="37261A"/>
-                </a:solidFill>
-                <a:latin typeface="맑은 고딕"/>
-                <a:ea typeface="맑은 고딕"/>
-              </a:rPr>
-              <a:t>범채원</a:t>
-            </a:r>
-          </a:p>
-        </p:txBody>
-      </p:sp>
-      <p:sp>
-        <p:nvSpPr>
-          <p:cNvPr id="6" name="텍스트"/>
-          <p:cNvSpPr txBox="1"/>
-          <p:nvPr/>
-        </p:nvSpPr>
-        <p:spPr>
-          <a:xfrm>
-            <a:off x="360000" y="784800"/>
-            <a:ext cx="2520000" cy="122400"/>
-          </a:xfrm>
-          <a:prstGeom prst="rect">
-            <a:avLst/>
-          </a:prstGeom>
-          <a:noFill/>
-        </p:spPr>
-        <p:txBody>
-          <a:bodyPr wrap="square" lIns="0" rIns="0" tIns="0" bIns="0" anchor="t">
-            <a:spAutoFit/>
-          </a:bodyPr>
-          <a:lstStyle/>
-          <a:p>
-            <a:pPr algn="ctr">
-              <a:lnSpc>
-                <a:spcPts val="1232"/>
-              </a:lnSpc>
-            </a:pPr>
-            <a:r>
-              <a:rPr sz="850" b="1">
-                <a:solidFill>
-                  <a:srgbClr val="765037"/>
-                </a:solidFill>
-                <a:latin typeface="맑은 고딕"/>
-                <a:ea typeface="맑은 고딕"/>
-              </a:rPr>
-              <a:t>행정주사</a:t>
-            </a:r>
-          </a:p>
-        </p:txBody>
-      </p:sp>
-      <p:sp>
-        <p:nvSpPr>
-          <p:cNvPr id="7" name="Rectangle 6"/>
-          <p:cNvSpPr/>
-          <p:nvPr/>
-        </p:nvSpPr>
-        <p:spPr>
-          <a:xfrm>
-            <a:off x="1530000" y="993600"/>
-            <a:ext cx="180000" cy="10800"/>
-          </a:xfrm>
-          <a:prstGeom prst="rect">
-            <a:avLst/>
-          </a:prstGeom>
-          <a:solidFill>
-            <a:srgbClr val="765037"/>
-          </a:solidFill>
-          <a:ln>
-            <a:noFill/>
-          </a:ln>
-        </p:spPr>
-        <p:txBody>
-          <a:bodyPr rtlCol="0" anchor="ctr"/>
-          <a:lstStyle/>
-          <a:p>
-            <a:pPr algn="ctr"/>
-          </a:p>
-        </p:txBody>
-      </p:sp>
-      <p:sp>
-        <p:nvSpPr>
-          <p:cNvPr id="8" name="텍스트"/>
-          <p:cNvSpPr txBox="1"/>
-          <p:nvPr/>
-        </p:nvSpPr>
-        <p:spPr>
-          <a:xfrm>
-            <a:off x="360000" y="1087200"/>
-            <a:ext cx="2520000" cy="108000"/>
-          </a:xfrm>
-          <a:prstGeom prst="rect">
-            <a:avLst/>
-          </a:prstGeom>
-          <a:noFill/>
-        </p:spPr>
-        <p:txBody>
-          <a:bodyPr wrap="square" lIns="0" rIns="0" tIns="0" bIns="0" anchor="t">
-            <a:spAutoFit/>
-          </a:bodyPr>
-          <a:lstStyle/>
-          <a:p>
-            <a:pPr algn="ctr">
-              <a:lnSpc>
-                <a:spcPts val="1087"/>
-              </a:lnSpc>
-            </a:pPr>
-            <a:r>
-              <a:rPr sz="750" b="0">
-                <a:solidFill>
-                  <a:srgbClr val="37261A"/>
-                </a:solidFill>
-                <a:latin typeface="맑은 고딕"/>
-                <a:ea typeface="맑은 고딕"/>
-              </a:rPr>
-              <a:t>010-1234-5678</a:t>
-            </a:r>
-          </a:p>
-        </p:txBody>
-      </p:sp>
-      <p:sp>
-        <p:nvSpPr>
-          <p:cNvPr id="9" name="텍스트"/>
-          <p:cNvSpPr txBox="1"/>
-          <p:nvPr/>
-        </p:nvSpPr>
-        <p:spPr>
-          <a:xfrm>
-            <a:off x="360000" y="1209600"/>
-            <a:ext cx="2520000" cy="108000"/>
-          </a:xfrm>
-          <a:prstGeom prst="rect">
-            <a:avLst/>
-          </a:prstGeom>
-          <a:noFill/>
-        </p:spPr>
-        <p:txBody>
-          <a:bodyPr wrap="square" lIns="0" rIns="0" tIns="0" bIns="0" anchor="t">
-            <a:spAutoFit/>
-          </a:bodyPr>
-          <a:lstStyle/>
-          <a:p>
-            <a:pPr algn="ctr">
-              <a:lnSpc>
-                <a:spcPts val="1087"/>
-              </a:lnSpc>
-            </a:pPr>
-            <a:r>
-              <a:rPr sz="750" b="0">
-                <a:solidFill>
-                  <a:srgbClr val="37261A"/>
-                </a:solidFill>
-                <a:latin typeface="맑은 고딕"/>
-                <a:ea typeface="맑은 고딕"/>
-              </a:rPr>
-              <a:t>name@example.com</a:t>
-            </a:r>
-          </a:p>
-        </p:txBody>
-      </p:sp>
-      <p:sp>
-        <p:nvSpPr>
-          <p:cNvPr id="10" name="텍스트"/>
-          <p:cNvSpPr txBox="1"/>
-          <p:nvPr/>
-        </p:nvSpPr>
-        <p:spPr>
-          <a:xfrm>
-            <a:off x="360000" y="1332000"/>
-            <a:ext cx="2520000" cy="108000"/>
-          </a:xfrm>
-          <a:prstGeom prst="rect">
-            <a:avLst/>
-          </a:prstGeom>
-          <a:noFill/>
-        </p:spPr>
-        <p:txBody>
-          <a:bodyPr wrap="square" lIns="0" rIns="0" tIns="0" bIns="0" anchor="t">
-            <a:spAutoFit/>
-          </a:bodyPr>
-          <a:lstStyle/>
-          <a:p>
-            <a:pPr algn="ctr">
-              <a:lnSpc>
-                <a:spcPts val="1015"/>
-              </a:lnSpc>
-            </a:pPr>
-            <a:r>
-              <a:rPr sz="700" b="0">
-                <a:solidFill>
-                  <a:srgbClr val="7B6E65"/>
-                </a:solidFill>
-                <a:latin typeface="맑은 고딕"/>
-                <a:ea typeface="맑은 고딕"/>
-              </a:rPr>
-              <a:t>주소를 입력해 주세요</a:t>
-            </a:r>
-          </a:p>
-        </p:txBody>
-      </p:sp>
-      <p:sp>
-        <p:nvSpPr>
-          <p:cNvPr id="11" name="Freeform 10"/>
-          <p:cNvSpPr/>
-          <p:nvPr/>
-        </p:nvSpPr>
-        <p:spPr>
-          <a:xfrm>
-            <a:off x="1557072" y="1490544"/>
-            <a:ext cx="125856" cy="57456"/>
+            <a:off x="2016000" y="0"/>
+            <a:ext cx="1224000" cy="1800000"/>
           </a:xfrm>
           <a:custGeom>
             <a:avLst/>
@@ -3442,22 +3115,25 @@
             <a:cxnLst/>
             <a:rect l="l" t="t" r="r" b="b"/>
             <a:pathLst>
-              <a:path w="125856" h="57456">
+              <a:path w="1224000" h="1800000">
                 <a:moveTo>
-                  <a:pt x="0" y="57456"/>
+                  <a:pt x="360000" y="0"/>
                 </a:moveTo>
                 <a:lnTo>
-                  <a:pt x="62928" y="0"/>
-                </a:lnTo>
-                <a:lnTo>
-                  <a:pt x="125856" y="57456"/>
+                  <a:pt x="1224000" y="0"/>
+                </a:lnTo>
+                <a:lnTo>
+                  <a:pt x="1224000" y="1800000"/>
+                </a:lnTo>
+                <a:lnTo>
+                  <a:pt x="0" y="1800000"/>
                 </a:lnTo>
                 <a:close/>
               </a:path>
             </a:pathLst>
           </a:custGeom>
           <a:solidFill>
-            <a:srgbClr val="765037"/>
+            <a:srgbClr val="0A47C7"/>
           </a:solidFill>
           <a:ln>
             <a:noFill/>
@@ -3473,20 +3149,190 @@
       </p:sp>
       <p:sp>
         <p:nvSpPr>
-          <p:cNvPr id="12" name="Rectangle 11"/>
+          <p:cNvPr id="3" name="Freeform 2"/>
           <p:cNvSpPr/>
           <p:nvPr/>
         </p:nvSpPr>
         <p:spPr>
           <a:xfrm>
-            <a:off x="1576224" y="1548000"/>
-            <a:ext cx="87552" cy="57456"/>
+            <a:off x="1864800" y="0"/>
+            <a:ext cx="460800" cy="1800000"/>
+          </a:xfrm>
+          <a:custGeom>
+            <a:avLst/>
+            <a:gdLst/>
+            <a:ahLst/>
+            <a:cxnLst/>
+            <a:rect l="l" t="t" r="r" b="b"/>
+            <a:pathLst>
+              <a:path w="460800" h="1800000">
+                <a:moveTo>
+                  <a:pt x="360000" y="0"/>
+                </a:moveTo>
+                <a:lnTo>
+                  <a:pt x="460800" y="0"/>
+                </a:lnTo>
+                <a:lnTo>
+                  <a:pt x="100800" y="1800000"/>
+                </a:lnTo>
+                <a:lnTo>
+                  <a:pt x="0" y="1800000"/>
+                </a:lnTo>
+                <a:close/>
+              </a:path>
+            </a:pathLst>
+          </a:custGeom>
+          <a:solidFill>
+            <a:srgbClr val="DDE5F7"/>
+          </a:solidFill>
+          <a:ln>
+            <a:noFill/>
+          </a:ln>
+        </p:spPr>
+        <p:txBody>
+          <a:bodyPr rtlCol="0" anchor="ctr"/>
+          <a:lstStyle/>
+          <a:p>
+            <a:pPr algn="ctr"/>
+          </a:p>
+        </p:txBody>
+      </p:sp>
+      <p:sp>
+        <p:nvSpPr>
+          <p:cNvPr id="4" name="텍스트"/>
+          <p:cNvSpPr txBox="1"/>
+          <p:nvPr/>
+        </p:nvSpPr>
+        <p:spPr>
+          <a:xfrm>
+            <a:off x="252000" y="223200"/>
+            <a:ext cx="1440000" cy="133351"/>
+          </a:xfrm>
+          <a:prstGeom prst="rect">
+            <a:avLst/>
+          </a:prstGeom>
+          <a:noFill/>
+        </p:spPr>
+        <p:txBody>
+          <a:bodyPr wrap="square" lIns="0" rIns="0" tIns="0" bIns="0" anchor="t">
+            <a:spAutoFit/>
+          </a:bodyPr>
+          <a:lstStyle/>
+          <a:p>
+            <a:pPr algn="l">
+              <a:lnSpc>
+                <a:spcPts val="1015"/>
+              </a:lnSpc>
+            </a:pPr>
+            <a:r>
+              <a:rPr sz="700" b="1" spc="200">
+                <a:solidFill>
+                  <a:srgbClr val="6B7280"/>
+                </a:solidFill>
+                <a:latin typeface="맑은 고딕"/>
+                <a:ea typeface="맑은 고딕"/>
+              </a:rPr>
+              <a:t>기관명 · 부서명</a:t>
+            </a:r>
+          </a:p>
+        </p:txBody>
+      </p:sp>
+      <p:sp>
+        <p:nvSpPr>
+          <p:cNvPr id="5" name="텍스트"/>
+          <p:cNvSpPr txBox="1"/>
+          <p:nvPr/>
+        </p:nvSpPr>
+        <p:spPr>
+          <a:xfrm>
+            <a:off x="252000" y="540000"/>
+            <a:ext cx="1584000" cy="360000"/>
+          </a:xfrm>
+          <a:prstGeom prst="rect">
+            <a:avLst/>
+          </a:prstGeom>
+          <a:noFill/>
+        </p:spPr>
+        <p:txBody>
+          <a:bodyPr wrap="square" lIns="0" rIns="0" tIns="0" bIns="0" anchor="t">
+            <a:spAutoFit/>
+          </a:bodyPr>
+          <a:lstStyle/>
+          <a:p>
+            <a:pPr algn="l">
+              <a:lnSpc>
+                <a:spcPts val="3190"/>
+              </a:lnSpc>
+            </a:pPr>
+            <a:r>
+              <a:rPr sz="2200" b="1">
+                <a:solidFill>
+                  <a:srgbClr val="12151C"/>
+                </a:solidFill>
+                <a:latin typeface="맑은 고딕"/>
+                <a:ea typeface="맑은 고딕"/>
+              </a:rPr>
+              <a:t>범채원</a:t>
+            </a:r>
+          </a:p>
+        </p:txBody>
+      </p:sp>
+      <p:sp>
+        <p:nvSpPr>
+          <p:cNvPr id="6" name="텍스트"/>
+          <p:cNvSpPr txBox="1"/>
+          <p:nvPr/>
+        </p:nvSpPr>
+        <p:spPr>
+          <a:xfrm>
+            <a:off x="252000" y="943200"/>
+            <a:ext cx="1584000" cy="171451"/>
+          </a:xfrm>
+          <a:prstGeom prst="rect">
+            <a:avLst/>
+          </a:prstGeom>
+          <a:noFill/>
+        </p:spPr>
+        <p:txBody>
+          <a:bodyPr wrap="square" lIns="0" rIns="0" tIns="0" bIns="0" anchor="t">
+            <a:spAutoFit/>
+          </a:bodyPr>
+          <a:lstStyle/>
+          <a:p>
+            <a:pPr algn="l">
+              <a:lnSpc>
+                <a:spcPts val="1305"/>
+              </a:lnSpc>
+            </a:pPr>
+            <a:r>
+              <a:rPr sz="900" b="0">
+                <a:solidFill>
+                  <a:srgbClr val="6B7280"/>
+                </a:solidFill>
+                <a:latin typeface="맑은 고딕"/>
+                <a:ea typeface="맑은 고딕"/>
+              </a:rPr>
+              <a:t>행정주사</a:t>
+            </a:r>
+          </a:p>
+        </p:txBody>
+      </p:sp>
+      <p:sp>
+        <p:nvSpPr>
+          <p:cNvPr id="7" name="Rectangle 6"/>
+          <p:cNvSpPr/>
+          <p:nvPr/>
+        </p:nvSpPr>
+        <p:spPr>
+          <a:xfrm>
+            <a:off x="252000" y="1195200"/>
+            <a:ext cx="144000" cy="18000"/>
           </a:xfrm>
           <a:prstGeom prst="rect">
             <a:avLst/>
           </a:prstGeom>
           <a:solidFill>
-            <a:srgbClr val="F2E8E1"/>
+            <a:srgbClr val="0A47C7"/>
           </a:solidFill>
           <a:ln>
             <a:noFill/>
@@ -3502,30 +3348,241 @@
       </p:sp>
       <p:sp>
         <p:nvSpPr>
-          <p:cNvPr id="13" name="Rectangle 12"/>
-          <p:cNvSpPr/>
+          <p:cNvPr id="8" name="텍스트"/>
+          <p:cNvSpPr txBox="1"/>
           <p:nvPr/>
         </p:nvSpPr>
         <p:spPr>
           <a:xfrm>
-            <a:off x="1609056" y="1567152"/>
-            <a:ext cx="21888" cy="38304"/>
+            <a:off x="252000" y="1328400"/>
+            <a:ext cx="331200" cy="99061"/>
           </a:xfrm>
           <a:prstGeom prst="rect">
             <a:avLst/>
           </a:prstGeom>
-          <a:solidFill>
-            <a:srgbClr val="765037"/>
-          </a:solidFill>
-          <a:ln>
-            <a:noFill/>
-          </a:ln>
+          <a:noFill/>
         </p:spPr>
         <p:txBody>
-          <a:bodyPr rtlCol="0" anchor="ctr"/>
-          <a:lstStyle/>
-          <a:p>
-            <a:pPr algn="ctr"/>
+          <a:bodyPr wrap="square" lIns="0" rIns="0" tIns="0" bIns="0" anchor="t">
+            <a:spAutoFit/>
+          </a:bodyPr>
+          <a:lstStyle/>
+          <a:p>
+            <a:pPr algn="l">
+              <a:lnSpc>
+                <a:spcPts val="754"/>
+              </a:lnSpc>
+            </a:pPr>
+            <a:r>
+              <a:rPr sz="520" b="1" spc="120">
+                <a:solidFill>
+                  <a:srgbClr val="6B7280"/>
+                </a:solidFill>
+                <a:latin typeface="맑은 고딕"/>
+                <a:ea typeface="맑은 고딕"/>
+              </a:rPr>
+              <a:t>TEL</a:t>
+            </a:r>
+          </a:p>
+        </p:txBody>
+      </p:sp>
+      <p:sp>
+        <p:nvSpPr>
+          <p:cNvPr id="9" name="텍스트"/>
+          <p:cNvSpPr txBox="1"/>
+          <p:nvPr/>
+        </p:nvSpPr>
+        <p:spPr>
+          <a:xfrm>
+            <a:off x="583200" y="1317600"/>
+            <a:ext cx="1188000" cy="125731"/>
+          </a:xfrm>
+          <a:prstGeom prst="rect">
+            <a:avLst/>
+          </a:prstGeom>
+          <a:noFill/>
+        </p:spPr>
+        <p:txBody>
+          <a:bodyPr wrap="square" lIns="0" rIns="0" tIns="0" bIns="0" anchor="t">
+            <a:spAutoFit/>
+          </a:bodyPr>
+          <a:lstStyle/>
+          <a:p>
+            <a:pPr algn="l">
+              <a:lnSpc>
+                <a:spcPts val="956"/>
+              </a:lnSpc>
+            </a:pPr>
+            <a:r>
+              <a:rPr sz="660" b="0">
+                <a:solidFill>
+                  <a:srgbClr val="12151C"/>
+                </a:solidFill>
+                <a:latin typeface="맑은 고딕"/>
+                <a:ea typeface="맑은 고딕"/>
+              </a:rPr>
+              <a:t>010-1234-5678</a:t>
+            </a:r>
+          </a:p>
+        </p:txBody>
+      </p:sp>
+      <p:sp>
+        <p:nvSpPr>
+          <p:cNvPr id="10" name="텍스트"/>
+          <p:cNvSpPr txBox="1"/>
+          <p:nvPr/>
+        </p:nvSpPr>
+        <p:spPr>
+          <a:xfrm>
+            <a:off x="252000" y="1458000"/>
+            <a:ext cx="331200" cy="99061"/>
+          </a:xfrm>
+          <a:prstGeom prst="rect">
+            <a:avLst/>
+          </a:prstGeom>
+          <a:noFill/>
+        </p:spPr>
+        <p:txBody>
+          <a:bodyPr wrap="square" lIns="0" rIns="0" tIns="0" bIns="0" anchor="t">
+            <a:spAutoFit/>
+          </a:bodyPr>
+          <a:lstStyle/>
+          <a:p>
+            <a:pPr algn="l">
+              <a:lnSpc>
+                <a:spcPts val="754"/>
+              </a:lnSpc>
+            </a:pPr>
+            <a:r>
+              <a:rPr sz="520" b="1" spc="120">
+                <a:solidFill>
+                  <a:srgbClr val="6B7280"/>
+                </a:solidFill>
+                <a:latin typeface="맑은 고딕"/>
+                <a:ea typeface="맑은 고딕"/>
+              </a:rPr>
+              <a:t>MAIL</a:t>
+            </a:r>
+          </a:p>
+        </p:txBody>
+      </p:sp>
+      <p:sp>
+        <p:nvSpPr>
+          <p:cNvPr id="11" name="텍스트"/>
+          <p:cNvSpPr txBox="1"/>
+          <p:nvPr/>
+        </p:nvSpPr>
+        <p:spPr>
+          <a:xfrm>
+            <a:off x="583200" y="1447200"/>
+            <a:ext cx="1188000" cy="125731"/>
+          </a:xfrm>
+          <a:prstGeom prst="rect">
+            <a:avLst/>
+          </a:prstGeom>
+          <a:noFill/>
+        </p:spPr>
+        <p:txBody>
+          <a:bodyPr wrap="square" lIns="0" rIns="0" tIns="0" bIns="0" anchor="t">
+            <a:spAutoFit/>
+          </a:bodyPr>
+          <a:lstStyle/>
+          <a:p>
+            <a:pPr algn="l">
+              <a:lnSpc>
+                <a:spcPts val="956"/>
+              </a:lnSpc>
+            </a:pPr>
+            <a:r>
+              <a:rPr sz="660" b="0">
+                <a:solidFill>
+                  <a:srgbClr val="12151C"/>
+                </a:solidFill>
+                <a:latin typeface="맑은 고딕"/>
+                <a:ea typeface="맑은 고딕"/>
+              </a:rPr>
+              <a:t>name@example.com</a:t>
+            </a:r>
+          </a:p>
+        </p:txBody>
+      </p:sp>
+      <p:sp>
+        <p:nvSpPr>
+          <p:cNvPr id="12" name="텍스트"/>
+          <p:cNvSpPr txBox="1"/>
+          <p:nvPr/>
+        </p:nvSpPr>
+        <p:spPr>
+          <a:xfrm>
+            <a:off x="252000" y="1587600"/>
+            <a:ext cx="331200" cy="99061"/>
+          </a:xfrm>
+          <a:prstGeom prst="rect">
+            <a:avLst/>
+          </a:prstGeom>
+          <a:noFill/>
+        </p:spPr>
+        <p:txBody>
+          <a:bodyPr wrap="square" lIns="0" rIns="0" tIns="0" bIns="0" anchor="t">
+            <a:spAutoFit/>
+          </a:bodyPr>
+          <a:lstStyle/>
+          <a:p>
+            <a:pPr algn="l">
+              <a:lnSpc>
+                <a:spcPts val="754"/>
+              </a:lnSpc>
+            </a:pPr>
+            <a:r>
+              <a:rPr sz="520" b="1" spc="120">
+                <a:solidFill>
+                  <a:srgbClr val="6B7280"/>
+                </a:solidFill>
+                <a:latin typeface="맑은 고딕"/>
+                <a:ea typeface="맑은 고딕"/>
+              </a:rPr>
+              <a:t>ADDR</a:t>
+            </a:r>
+          </a:p>
+        </p:txBody>
+      </p:sp>
+      <p:sp>
+        <p:nvSpPr>
+          <p:cNvPr id="13" name="텍스트"/>
+          <p:cNvSpPr txBox="1"/>
+          <p:nvPr/>
+        </p:nvSpPr>
+        <p:spPr>
+          <a:xfrm>
+            <a:off x="583200" y="1576800"/>
+            <a:ext cx="1188000" cy="125731"/>
+          </a:xfrm>
+          <a:prstGeom prst="rect">
+            <a:avLst/>
+          </a:prstGeom>
+          <a:noFill/>
+        </p:spPr>
+        <p:txBody>
+          <a:bodyPr wrap="square" lIns="0" rIns="0" tIns="0" bIns="0" anchor="t">
+            <a:spAutoFit/>
+          </a:bodyPr>
+          <a:lstStyle/>
+          <a:p>
+            <a:pPr algn="l">
+              <a:lnSpc>
+                <a:spcPts val="956"/>
+              </a:lnSpc>
+            </a:pPr>
+            <a:r>
+              <a:rPr sz="660" b="0">
+                <a:solidFill>
+                  <a:srgbClr val="12151C"/>
+                </a:solidFill>
+                <a:latin typeface="맑은 고딕"/>
+                <a:ea typeface="맑은 고딕"/>
+              </a:rPr>
+              <a:t>주소를 입력해 주세요</a:t>
+            </a:r>
           </a:p>
         </p:txBody>
       </p:sp>
@@ -3543,7 +3600,7 @@
     <p:bg>
       <p:bgPr>
         <a:solidFill>
-          <a:srgbClr val="FBF8F2"/>
+          <a:srgbClr val="0E1116"/>
         </a:solidFill>
         <a:effectLst/>
       </p:bgPr>
@@ -3555,413 +3612,109 @@
         <p:nvPr/>
       </p:nvGrpSpPr>
       <p:grpSpPr/>
-      <p:cxnSp>
-        <p:nvCxnSpPr>
-          <p:cNvPr id="2" name="Connector 1"/>
-          <p:cNvCxnSpPr/>
+      <p:sp>
+        <p:nvSpPr>
+          <p:cNvPr id="2" name="Freeform 1"/>
+          <p:cNvSpPr/>
           <p:nvPr/>
-        </p:nvCxnSpPr>
+        </p:nvSpPr>
         <p:spPr>
           <a:xfrm>
-            <a:off x="0" y="93600"/>
-            <a:ext cx="3240000" cy="0"/>
+            <a:off x="0" y="0"/>
+            <a:ext cx="1080000" cy="1080000"/>
           </a:xfrm>
-          <a:prstGeom prst="line">
+          <a:custGeom>
             <a:avLst/>
-          </a:prstGeom>
-          <a:ln w="7200">
-            <a:solidFill>
-              <a:srgbClr val="478578">
-                <a:alpha val="30000"/>
-              </a:srgbClr>
-            </a:solidFill>
-          </a:ln>
-        </p:spPr>
-      </p:cxnSp>
-      <p:cxnSp>
-        <p:nvCxnSpPr>
-          <p:cNvPr id="3" name="Connector 2"/>
-          <p:cNvCxnSpPr/>
-          <p:nvPr/>
-        </p:nvCxnSpPr>
-        <p:spPr>
-          <a:xfrm>
-            <a:off x="0" y="201600"/>
-            <a:ext cx="3240000" cy="0"/>
-          </a:xfrm>
-          <a:prstGeom prst="line">
-            <a:avLst/>
-          </a:prstGeom>
-          <a:ln w="7200">
-            <a:solidFill>
-              <a:srgbClr val="478578">
-                <a:alpha val="30000"/>
-              </a:srgbClr>
-            </a:solidFill>
-          </a:ln>
-        </p:spPr>
-      </p:cxnSp>
-      <p:cxnSp>
-        <p:nvCxnSpPr>
-          <p:cNvPr id="4" name="Connector 3"/>
-          <p:cNvCxnSpPr/>
-          <p:nvPr/>
-        </p:nvCxnSpPr>
-        <p:spPr>
-          <a:xfrm>
-            <a:off x="0" y="309600"/>
-            <a:ext cx="3240000" cy="0"/>
-          </a:xfrm>
-          <a:prstGeom prst="line">
-            <a:avLst/>
-          </a:prstGeom>
-          <a:ln w="7200">
-            <a:solidFill>
-              <a:srgbClr val="478578">
-                <a:alpha val="30000"/>
-              </a:srgbClr>
-            </a:solidFill>
-          </a:ln>
-        </p:spPr>
-      </p:cxnSp>
-      <p:cxnSp>
-        <p:nvCxnSpPr>
-          <p:cNvPr id="5" name="Connector 4"/>
-          <p:cNvCxnSpPr/>
-          <p:nvPr/>
-        </p:nvCxnSpPr>
-        <p:spPr>
-          <a:xfrm>
-            <a:off x="0" y="417600"/>
-            <a:ext cx="3240000" cy="0"/>
-          </a:xfrm>
-          <a:prstGeom prst="line">
-            <a:avLst/>
-          </a:prstGeom>
-          <a:ln w="7200">
-            <a:solidFill>
-              <a:srgbClr val="478578">
-                <a:alpha val="30000"/>
-              </a:srgbClr>
-            </a:solidFill>
-          </a:ln>
-        </p:spPr>
-      </p:cxnSp>
-      <p:cxnSp>
-        <p:nvCxnSpPr>
-          <p:cNvPr id="6" name="Connector 5"/>
-          <p:cNvCxnSpPr/>
-          <p:nvPr/>
-        </p:nvCxnSpPr>
-        <p:spPr>
-          <a:xfrm>
-            <a:off x="0" y="525600"/>
-            <a:ext cx="3240000" cy="0"/>
-          </a:xfrm>
-          <a:prstGeom prst="line">
-            <a:avLst/>
-          </a:prstGeom>
-          <a:ln w="7200">
-            <a:solidFill>
-              <a:srgbClr val="478578">
-                <a:alpha val="30000"/>
-              </a:srgbClr>
-            </a:solidFill>
-          </a:ln>
-        </p:spPr>
-      </p:cxnSp>
-      <p:cxnSp>
-        <p:nvCxnSpPr>
-          <p:cNvPr id="7" name="Connector 6"/>
-          <p:cNvCxnSpPr/>
-          <p:nvPr/>
-        </p:nvCxnSpPr>
-        <p:spPr>
-          <a:xfrm>
-            <a:off x="0" y="633600"/>
-            <a:ext cx="3240000" cy="0"/>
-          </a:xfrm>
-          <a:prstGeom prst="line">
-            <a:avLst/>
-          </a:prstGeom>
-          <a:ln w="7200">
-            <a:solidFill>
-              <a:srgbClr val="478578">
-                <a:alpha val="30000"/>
-              </a:srgbClr>
-            </a:solidFill>
-          </a:ln>
-        </p:spPr>
-      </p:cxnSp>
-      <p:cxnSp>
-        <p:nvCxnSpPr>
-          <p:cNvPr id="8" name="Connector 7"/>
-          <p:cNvCxnSpPr/>
-          <p:nvPr/>
-        </p:nvCxnSpPr>
-        <p:spPr>
-          <a:xfrm>
-            <a:off x="0" y="741600"/>
-            <a:ext cx="3240000" cy="0"/>
-          </a:xfrm>
-          <a:prstGeom prst="line">
-            <a:avLst/>
-          </a:prstGeom>
-          <a:ln w="7200">
-            <a:solidFill>
-              <a:srgbClr val="478578">
-                <a:alpha val="30000"/>
-              </a:srgbClr>
-            </a:solidFill>
-          </a:ln>
-        </p:spPr>
-      </p:cxnSp>
-      <p:cxnSp>
-        <p:nvCxnSpPr>
-          <p:cNvPr id="9" name="Connector 8"/>
-          <p:cNvCxnSpPr/>
-          <p:nvPr/>
-        </p:nvCxnSpPr>
-        <p:spPr>
-          <a:xfrm>
-            <a:off x="0" y="849600"/>
-            <a:ext cx="3240000" cy="0"/>
-          </a:xfrm>
-          <a:prstGeom prst="line">
-            <a:avLst/>
-          </a:prstGeom>
-          <a:ln w="7200">
-            <a:solidFill>
-              <a:srgbClr val="478578">
-                <a:alpha val="30000"/>
-              </a:srgbClr>
-            </a:solidFill>
-          </a:ln>
-        </p:spPr>
-      </p:cxnSp>
-      <p:cxnSp>
-        <p:nvCxnSpPr>
-          <p:cNvPr id="10" name="Connector 9"/>
-          <p:cNvCxnSpPr/>
-          <p:nvPr/>
-        </p:nvCxnSpPr>
-        <p:spPr>
-          <a:xfrm>
-            <a:off x="0" y="957600"/>
-            <a:ext cx="3240000" cy="0"/>
-          </a:xfrm>
-          <a:prstGeom prst="line">
-            <a:avLst/>
-          </a:prstGeom>
-          <a:ln w="7200">
-            <a:solidFill>
-              <a:srgbClr val="478578">
-                <a:alpha val="30000"/>
-              </a:srgbClr>
-            </a:solidFill>
-          </a:ln>
-        </p:spPr>
-      </p:cxnSp>
-      <p:cxnSp>
-        <p:nvCxnSpPr>
-          <p:cNvPr id="11" name="Connector 10"/>
-          <p:cNvCxnSpPr/>
-          <p:nvPr/>
-        </p:nvCxnSpPr>
-        <p:spPr>
-          <a:xfrm>
-            <a:off x="0" y="1065600"/>
-            <a:ext cx="3240000" cy="0"/>
-          </a:xfrm>
-          <a:prstGeom prst="line">
-            <a:avLst/>
-          </a:prstGeom>
-          <a:ln w="7200">
-            <a:solidFill>
-              <a:srgbClr val="478578">
-                <a:alpha val="30000"/>
-              </a:srgbClr>
-            </a:solidFill>
-          </a:ln>
-        </p:spPr>
-      </p:cxnSp>
-      <p:cxnSp>
-        <p:nvCxnSpPr>
-          <p:cNvPr id="12" name="Connector 11"/>
-          <p:cNvCxnSpPr/>
-          <p:nvPr/>
-        </p:nvCxnSpPr>
-        <p:spPr>
-          <a:xfrm>
-            <a:off x="0" y="1173600"/>
-            <a:ext cx="3240000" cy="0"/>
-          </a:xfrm>
-          <a:prstGeom prst="line">
-            <a:avLst/>
-          </a:prstGeom>
-          <a:ln w="7200">
-            <a:solidFill>
-              <a:srgbClr val="478578">
-                <a:alpha val="30000"/>
-              </a:srgbClr>
-            </a:solidFill>
-          </a:ln>
-        </p:spPr>
-      </p:cxnSp>
-      <p:cxnSp>
-        <p:nvCxnSpPr>
-          <p:cNvPr id="13" name="Connector 12"/>
-          <p:cNvCxnSpPr/>
-          <p:nvPr/>
-        </p:nvCxnSpPr>
-        <p:spPr>
-          <a:xfrm>
-            <a:off x="0" y="1281600"/>
-            <a:ext cx="3240000" cy="0"/>
-          </a:xfrm>
-          <a:prstGeom prst="line">
-            <a:avLst/>
-          </a:prstGeom>
-          <a:ln w="7200">
-            <a:solidFill>
-              <a:srgbClr val="478578">
-                <a:alpha val="30000"/>
-              </a:srgbClr>
-            </a:solidFill>
-          </a:ln>
-        </p:spPr>
-      </p:cxnSp>
-      <p:cxnSp>
-        <p:nvCxnSpPr>
-          <p:cNvPr id="14" name="Connector 13"/>
-          <p:cNvCxnSpPr/>
-          <p:nvPr/>
-        </p:nvCxnSpPr>
-        <p:spPr>
-          <a:xfrm>
-            <a:off x="0" y="1389600"/>
-            <a:ext cx="3240000" cy="0"/>
-          </a:xfrm>
-          <a:prstGeom prst="line">
-            <a:avLst/>
-          </a:prstGeom>
-          <a:ln w="7200">
-            <a:solidFill>
-              <a:srgbClr val="478578">
-                <a:alpha val="30000"/>
-              </a:srgbClr>
-            </a:solidFill>
-          </a:ln>
-        </p:spPr>
-      </p:cxnSp>
-      <p:cxnSp>
-        <p:nvCxnSpPr>
-          <p:cNvPr id="15" name="Connector 14"/>
-          <p:cNvCxnSpPr/>
-          <p:nvPr/>
-        </p:nvCxnSpPr>
-        <p:spPr>
-          <a:xfrm>
-            <a:off x="0" y="1497600"/>
-            <a:ext cx="3240000" cy="0"/>
-          </a:xfrm>
-          <a:prstGeom prst="line">
-            <a:avLst/>
-          </a:prstGeom>
-          <a:ln w="7200">
-            <a:solidFill>
-              <a:srgbClr val="478578">
-                <a:alpha val="30000"/>
-              </a:srgbClr>
-            </a:solidFill>
-          </a:ln>
-        </p:spPr>
-      </p:cxnSp>
-      <p:cxnSp>
-        <p:nvCxnSpPr>
-          <p:cNvPr id="16" name="Connector 15"/>
-          <p:cNvCxnSpPr/>
-          <p:nvPr/>
-        </p:nvCxnSpPr>
-        <p:spPr>
-          <a:xfrm>
-            <a:off x="0" y="1605600"/>
-            <a:ext cx="3240000" cy="0"/>
-          </a:xfrm>
-          <a:prstGeom prst="line">
-            <a:avLst/>
-          </a:prstGeom>
-          <a:ln w="7200">
-            <a:solidFill>
-              <a:srgbClr val="478578">
-                <a:alpha val="30000"/>
-              </a:srgbClr>
-            </a:solidFill>
-          </a:ln>
-        </p:spPr>
-      </p:cxnSp>
-      <p:cxnSp>
-        <p:nvCxnSpPr>
-          <p:cNvPr id="17" name="Connector 16"/>
-          <p:cNvCxnSpPr/>
-          <p:nvPr/>
-        </p:nvCxnSpPr>
-        <p:spPr>
-          <a:xfrm>
-            <a:off x="0" y="1713600"/>
-            <a:ext cx="3240000" cy="0"/>
-          </a:xfrm>
-          <a:prstGeom prst="line">
-            <a:avLst/>
-          </a:prstGeom>
-          <a:ln w="7200">
-            <a:solidFill>
-              <a:srgbClr val="478578">
-                <a:alpha val="30000"/>
-              </a:srgbClr>
-            </a:solidFill>
-          </a:ln>
-        </p:spPr>
-      </p:cxnSp>
-      <p:cxnSp>
-        <p:nvCxnSpPr>
-          <p:cNvPr id="18" name="Connector 17"/>
-          <p:cNvCxnSpPr/>
-          <p:nvPr/>
-        </p:nvCxnSpPr>
-        <p:spPr>
-          <a:xfrm>
-            <a:off x="0" y="1821600"/>
-            <a:ext cx="3240000" cy="0"/>
-          </a:xfrm>
-          <a:prstGeom prst="line">
-            <a:avLst/>
-          </a:prstGeom>
-          <a:ln w="7200">
-            <a:solidFill>
-              <a:srgbClr val="478578">
-                <a:alpha val="30000"/>
-              </a:srgbClr>
-            </a:solidFill>
-          </a:ln>
-        </p:spPr>
-      </p:cxnSp>
-      <p:sp>
-        <p:nvSpPr>
-          <p:cNvPr id="19" name="Rectangle 18"/>
-          <p:cNvSpPr/>
-          <p:nvPr/>
-        </p:nvSpPr>
-        <p:spPr>
-          <a:xfrm>
-            <a:off x="468000" y="468000"/>
-            <a:ext cx="2304000" cy="864000"/>
-          </a:xfrm>
-          <a:prstGeom prst="rect">
-            <a:avLst/>
-          </a:prstGeom>
+            <a:gdLst/>
+            <a:ahLst/>
+            <a:cxnLst/>
+            <a:rect l="l" t="t" r="r" b="b"/>
+            <a:pathLst>
+              <a:path w="1080000" h="1080000">
+                <a:moveTo>
+                  <a:pt x="0" y="0"/>
+                </a:moveTo>
+                <a:lnTo>
+                  <a:pt x="1080000" y="0"/>
+                </a:lnTo>
+                <a:lnTo>
+                  <a:pt x="1077688" y="70635"/>
+                </a:lnTo>
+                <a:lnTo>
+                  <a:pt x="1070760" y="140968"/>
+                </a:lnTo>
+                <a:lnTo>
+                  <a:pt x="1059248" y="210698"/>
+                </a:lnTo>
+                <a:lnTo>
+                  <a:pt x="1043200" y="279525"/>
+                </a:lnTo>
+                <a:lnTo>
+                  <a:pt x="1022685" y="347155"/>
+                </a:lnTo>
+                <a:lnTo>
+                  <a:pt x="997790" y="413298"/>
+                </a:lnTo>
+                <a:lnTo>
+                  <a:pt x="968623" y="477672"/>
+                </a:lnTo>
+                <a:lnTo>
+                  <a:pt x="935307" y="540000"/>
+                </a:lnTo>
+                <a:lnTo>
+                  <a:pt x="897987" y="600016"/>
+                </a:lnTo>
+                <a:lnTo>
+                  <a:pt x="856822" y="657462"/>
+                </a:lnTo>
+                <a:lnTo>
+                  <a:pt x="811987" y="712093"/>
+                </a:lnTo>
+                <a:lnTo>
+                  <a:pt x="763675" y="763675"/>
+                </a:lnTo>
+                <a:lnTo>
+                  <a:pt x="712093" y="811987"/>
+                </a:lnTo>
+                <a:lnTo>
+                  <a:pt x="657462" y="856822"/>
+                </a:lnTo>
+                <a:lnTo>
+                  <a:pt x="600016" y="897987"/>
+                </a:lnTo>
+                <a:lnTo>
+                  <a:pt x="540000" y="935307"/>
+                </a:lnTo>
+                <a:lnTo>
+                  <a:pt x="477672" y="968623"/>
+                </a:lnTo>
+                <a:lnTo>
+                  <a:pt x="413298" y="997790"/>
+                </a:lnTo>
+                <a:lnTo>
+                  <a:pt x="347155" y="1022685"/>
+                </a:lnTo>
+                <a:lnTo>
+                  <a:pt x="279525" y="1043200"/>
+                </a:lnTo>
+                <a:lnTo>
+                  <a:pt x="210698" y="1059248"/>
+                </a:lnTo>
+                <a:lnTo>
+                  <a:pt x="140968" y="1070760"/>
+                </a:lnTo>
+                <a:lnTo>
+                  <a:pt x="70635" y="1077688"/>
+                </a:lnTo>
+                <a:lnTo>
+                  <a:pt x="0" y="1080000"/>
+                </a:lnTo>
+                <a:close/>
+              </a:path>
+            </a:pathLst>
+          </a:custGeom>
           <a:solidFill>
-            <a:srgbClr val="FBF8F2"/>
+            <a:srgbClr val="4170D4"/>
           </a:solidFill>
           <a:ln>
             <a:noFill/>
@@ -3977,23 +3730,110 @@
       </p:sp>
       <p:sp>
         <p:nvSpPr>
-          <p:cNvPr id="20" name="Rectangle 19"/>
+          <p:cNvPr id="3" name="Freeform 2"/>
           <p:cNvSpPr/>
           <p:nvPr/>
         </p:nvSpPr>
         <p:spPr>
           <a:xfrm>
-            <a:off x="468000" y="468000"/>
-            <a:ext cx="2304000" cy="864000"/>
+            <a:off x="0" y="0"/>
+            <a:ext cx="684000" cy="684000"/>
           </a:xfrm>
-          <a:prstGeom prst="rect">
+          <a:custGeom>
             <a:avLst/>
-          </a:prstGeom>
-          <a:noFill/>
-          <a:ln w="9000">
-            <a:solidFill>
-              <a:srgbClr val="478578"/>
-            </a:solidFill>
+            <a:gdLst/>
+            <a:ahLst/>
+            <a:cxnLst/>
+            <a:rect l="l" t="t" r="r" b="b"/>
+            <a:pathLst>
+              <a:path w="684000" h="684000">
+                <a:moveTo>
+                  <a:pt x="0" y="0"/>
+                </a:moveTo>
+                <a:lnTo>
+                  <a:pt x="684000" y="0"/>
+                </a:lnTo>
+                <a:lnTo>
+                  <a:pt x="682536" y="44736"/>
+                </a:lnTo>
+                <a:lnTo>
+                  <a:pt x="678148" y="89280"/>
+                </a:lnTo>
+                <a:lnTo>
+                  <a:pt x="670857" y="133442"/>
+                </a:lnTo>
+                <a:lnTo>
+                  <a:pt x="660693" y="177032"/>
+                </a:lnTo>
+                <a:lnTo>
+                  <a:pt x="647700" y="219865"/>
+                </a:lnTo>
+                <a:lnTo>
+                  <a:pt x="631934" y="261755"/>
+                </a:lnTo>
+                <a:lnTo>
+                  <a:pt x="613461" y="302525"/>
+                </a:lnTo>
+                <a:lnTo>
+                  <a:pt x="592361" y="342000"/>
+                </a:lnTo>
+                <a:lnTo>
+                  <a:pt x="568725" y="380010"/>
+                </a:lnTo>
+                <a:lnTo>
+                  <a:pt x="542654" y="416393"/>
+                </a:lnTo>
+                <a:lnTo>
+                  <a:pt x="514258" y="450993"/>
+                </a:lnTo>
+                <a:lnTo>
+                  <a:pt x="483661" y="483661"/>
+                </a:lnTo>
+                <a:lnTo>
+                  <a:pt x="450993" y="514258"/>
+                </a:lnTo>
+                <a:lnTo>
+                  <a:pt x="416393" y="542654"/>
+                </a:lnTo>
+                <a:lnTo>
+                  <a:pt x="380010" y="568725"/>
+                </a:lnTo>
+                <a:lnTo>
+                  <a:pt x="342000" y="592361"/>
+                </a:lnTo>
+                <a:lnTo>
+                  <a:pt x="302525" y="613461"/>
+                </a:lnTo>
+                <a:lnTo>
+                  <a:pt x="261755" y="631934"/>
+                </a:lnTo>
+                <a:lnTo>
+                  <a:pt x="219865" y="647700"/>
+                </a:lnTo>
+                <a:lnTo>
+                  <a:pt x="177032" y="660693"/>
+                </a:lnTo>
+                <a:lnTo>
+                  <a:pt x="133442" y="670857"/>
+                </a:lnTo>
+                <a:lnTo>
+                  <a:pt x="89280" y="678148"/>
+                </a:lnTo>
+                <a:lnTo>
+                  <a:pt x="44736" y="682536"/>
+                </a:lnTo>
+                <a:lnTo>
+                  <a:pt x="0" y="684000"/>
+                </a:lnTo>
+                <a:close/>
+              </a:path>
+            </a:pathLst>
+          </a:custGeom>
+          <a:solidFill>
+            <a:srgbClr val="26292D"/>
+          </a:solidFill>
+          <a:ln>
+            <a:noFill/>
           </a:ln>
         </p:spPr>
         <p:txBody>
@@ -4006,14 +3846,14 @@
       </p:sp>
       <p:sp>
         <p:nvSpPr>
-          <p:cNvPr id="21" name="텍스트"/>
+          <p:cNvPr id="4" name="텍스트"/>
           <p:cNvSpPr txBox="1"/>
           <p:nvPr/>
         </p:nvSpPr>
         <p:spPr>
           <a:xfrm>
-            <a:off x="576000" y="540000"/>
-            <a:ext cx="2088000" cy="720000"/>
+            <a:off x="1188000" y="1044000"/>
+            <a:ext cx="1800000" cy="432000"/>
           </a:xfrm>
           <a:prstGeom prst="rect">
             <a:avLst/>
@@ -4021,39 +3861,56 @@
           <a:noFill/>
         </p:spPr>
         <p:txBody>
-          <a:bodyPr wrap="square" lIns="0" rIns="0" tIns="0" bIns="0" anchor="ctr">
+          <a:bodyPr wrap="square" lIns="0" rIns="0" tIns="0" bIns="0" anchor="t">
             <a:spAutoFit/>
           </a:bodyPr>
           <a:lstStyle/>
           <a:p>
-            <a:pPr algn="ctr">
+            <a:pPr algn="r">
               <a:lnSpc>
-                <a:spcPts val="1667"/>
+                <a:spcPts val="1739"/>
               </a:lnSpc>
             </a:pPr>
             <a:r>
-              <a:rPr sz="1150" b="1">
+              <a:rPr sz="1200" b="1">
                 <a:solidFill>
-                  <a:srgbClr val="422D24"/>
+                  <a:srgbClr val="FFFFFF"/>
                 </a:solidFill>
-                <a:latin typeface="바탕"/>
-                <a:ea typeface="바탕"/>
+                <a:latin typeface="맑은 고딕"/>
+                <a:ea typeface="맑은 고딕"/>
               </a:rPr>
-              <a:t>공정과 상식을 지키겠습니다</a:t>
-            </a:r>
-          </a:p>
-        </p:txBody>
-      </p:sp>
-      <p:sp>
-        <p:nvSpPr>
-          <p:cNvPr id="22" name="텍스트"/>
+              <a:t>공정과 상식을</a:t>
+            </a:r>
+          </a:p>
+          <a:p>
+            <a:pPr algn="r">
+              <a:lnSpc>
+                <a:spcPts val="1739"/>
+              </a:lnSpc>
+            </a:pPr>
+            <a:r>
+              <a:rPr sz="1200" b="1">
+                <a:solidFill>
+                  <a:srgbClr val="FFFFFF"/>
+                </a:solidFill>
+                <a:latin typeface="맑은 고딕"/>
+                <a:ea typeface="맑은 고딕"/>
+              </a:rPr>
+              <a:t>지키겠습니다</a:t>
+            </a:r>
+          </a:p>
+        </p:txBody>
+      </p:sp>
+      <p:sp>
+        <p:nvSpPr>
+          <p:cNvPr id="5" name="텍스트"/>
           <p:cNvSpPr txBox="1"/>
           <p:nvPr/>
         </p:nvSpPr>
         <p:spPr>
           <a:xfrm>
-            <a:off x="360000" y="1468800"/>
-            <a:ext cx="2520000" cy="108000"/>
+            <a:off x="1188000" y="1526400"/>
+            <a:ext cx="1800000" cy="123826"/>
           </a:xfrm>
           <a:prstGeom prst="rect">
             <a:avLst/>
@@ -4066,15 +3923,15 @@
           </a:bodyPr>
           <a:lstStyle/>
           <a:p>
-            <a:pPr algn="ctr">
+            <a:pPr algn="r">
               <a:lnSpc>
-                <a:spcPts val="1015"/>
+                <a:spcPts val="942"/>
               </a:lnSpc>
             </a:pPr>
             <a:r>
-              <a:rPr sz="700" b="1" spc="300">
+              <a:rPr sz="650" b="1" spc="200">
                 <a:solidFill>
-                  <a:srgbClr val="7C6E67"/>
+                  <a:srgbClr val="A3A9B5"/>
                 </a:solidFill>
                 <a:latin typeface="맑은 고딕"/>
                 <a:ea typeface="맑은 고딕"/>

--- a/public/fun/cards/public/public-47.pptx
+++ b/public/fun/cards/public/public-47.pptx
@@ -3105,8 +3105,8 @@
         </p:nvSpPr>
         <p:spPr>
           <a:xfrm>
-            <a:off x="2016000" y="0"/>
-            <a:ext cx="1224000" cy="1800000"/>
+            <a:off x="2124000" y="0"/>
+            <a:ext cx="1116000" cy="1800000"/>
           </a:xfrm>
           <a:custGeom>
             <a:avLst/>
@@ -3115,15 +3115,15 @@
             <a:cxnLst/>
             <a:rect l="l" t="t" r="r" b="b"/>
             <a:pathLst>
-              <a:path w="1224000" h="1800000">
+              <a:path w="1116000" h="1800000">
                 <a:moveTo>
                   <a:pt x="360000" y="0"/>
                 </a:moveTo>
                 <a:lnTo>
-                  <a:pt x="1224000" y="0"/>
+                  <a:pt x="1116000" y="0"/>
                 </a:lnTo>
                 <a:lnTo>
-                  <a:pt x="1224000" y="1800000"/>
+                  <a:pt x="1116000" y="1800000"/>
                 </a:lnTo>
                 <a:lnTo>
                   <a:pt x="0" y="1800000"/>
@@ -3147,66 +3147,79 @@
           </a:p>
         </p:txBody>
       </p:sp>
-      <p:sp>
-        <p:nvSpPr>
-          <p:cNvPr id="3" name="Freeform 2"/>
-          <p:cNvSpPr/>
+      <p:cxnSp>
+        <p:nvCxnSpPr>
+          <p:cNvPr id="3" name="Connector 2"/>
+          <p:cNvCxnSpPr/>
           <p:nvPr/>
-        </p:nvSpPr>
-        <p:spPr>
-          <a:xfrm>
-            <a:off x="1864800" y="0"/>
-            <a:ext cx="460800" cy="1800000"/>
-          </a:xfrm>
-          <a:custGeom>
+        </p:nvCxnSpPr>
+        <p:spPr>
+          <a:xfrm flipH="1">
+            <a:off x="2044800" y="0"/>
+            <a:ext cx="360000" cy="1800000"/>
+          </a:xfrm>
+          <a:prstGeom prst="line">
             <a:avLst/>
-            <a:gdLst/>
-            <a:ahLst/>
-            <a:cxnLst/>
-            <a:rect l="l" t="t" r="r" b="b"/>
-            <a:pathLst>
-              <a:path w="460800" h="1800000">
-                <a:moveTo>
-                  <a:pt x="360000" y="0"/>
-                </a:moveTo>
-                <a:lnTo>
-                  <a:pt x="460800" y="0"/>
-                </a:lnTo>
-                <a:lnTo>
-                  <a:pt x="100800" y="1800000"/>
-                </a:lnTo>
-                <a:lnTo>
-                  <a:pt x="0" y="1800000"/>
-                </a:lnTo>
-                <a:close/>
-              </a:path>
-            </a:pathLst>
-          </a:custGeom>
-          <a:solidFill>
-            <a:srgbClr val="DDE5F7"/>
-          </a:solidFill>
-          <a:ln>
-            <a:noFill/>
+          </a:prstGeom>
+          <a:ln w="3600">
+            <a:solidFill>
+              <a:srgbClr val="DDE5F7"/>
+            </a:solidFill>
           </a:ln>
         </p:spPr>
-        <p:txBody>
-          <a:bodyPr rtlCol="0" anchor="ctr"/>
-          <a:lstStyle/>
-          <a:p>
-            <a:pPr algn="ctr"/>
-          </a:p>
-        </p:txBody>
-      </p:sp>
-      <p:sp>
-        <p:nvSpPr>
-          <p:cNvPr id="4" name="텍스트"/>
+      </p:cxnSp>
+      <p:cxnSp>
+        <p:nvCxnSpPr>
+          <p:cNvPr id="4" name="Connector 3"/>
+          <p:cNvCxnSpPr/>
+          <p:nvPr/>
+        </p:nvCxnSpPr>
+        <p:spPr>
+          <a:xfrm flipH="1">
+            <a:off x="1965600" y="0"/>
+            <a:ext cx="360000" cy="1800000"/>
+          </a:xfrm>
+          <a:prstGeom prst="line">
+            <a:avLst/>
+          </a:prstGeom>
+          <a:ln w="3600">
+            <a:solidFill>
+              <a:srgbClr val="DDE5F7"/>
+            </a:solidFill>
+          </a:ln>
+        </p:spPr>
+      </p:cxnSp>
+      <p:cxnSp>
+        <p:nvCxnSpPr>
+          <p:cNvPr id="5" name="Connector 4"/>
+          <p:cNvCxnSpPr/>
+          <p:nvPr/>
+        </p:nvCxnSpPr>
+        <p:spPr>
+          <a:xfrm flipH="1">
+            <a:off x="1886400" y="0"/>
+            <a:ext cx="360000" cy="1800000"/>
+          </a:xfrm>
+          <a:prstGeom prst="line">
+            <a:avLst/>
+          </a:prstGeom>
+          <a:ln w="3600">
+            <a:solidFill>
+              <a:srgbClr val="DDE5F7"/>
+            </a:solidFill>
+          </a:ln>
+        </p:spPr>
+      </p:cxnSp>
+      <p:sp>
+        <p:nvSpPr>
+          <p:cNvPr id="6" name="텍스트"/>
           <p:cNvSpPr txBox="1"/>
           <p:nvPr/>
         </p:nvSpPr>
         <p:spPr>
           <a:xfrm>
-            <a:off x="252000" y="223200"/>
-            <a:ext cx="1440000" cy="133351"/>
+            <a:off x="252000" y="252000"/>
+            <a:ext cx="1440000" cy="123826"/>
           </a:xfrm>
           <a:prstGeom prst="rect">
             <a:avLst/>
@@ -3221,11 +3234,11 @@
           <a:p>
             <a:pPr algn="l">
               <a:lnSpc>
-                <a:spcPts val="1015"/>
+                <a:spcPts val="942"/>
               </a:lnSpc>
             </a:pPr>
             <a:r>
-              <a:rPr sz="700" b="1" spc="200">
+              <a:rPr sz="650" b="1" spc="220">
                 <a:solidFill>
                   <a:srgbClr val="6B7280"/>
                 </a:solidFill>
@@ -3237,16 +3250,37 @@
           </a:p>
         </p:txBody>
       </p:sp>
-      <p:sp>
-        <p:nvSpPr>
-          <p:cNvPr id="5" name="텍스트"/>
+      <p:cxnSp>
+        <p:nvCxnSpPr>
+          <p:cNvPr id="7" name="Connector 6"/>
+          <p:cNvCxnSpPr/>
+          <p:nvPr/>
+        </p:nvCxnSpPr>
+        <p:spPr>
+          <a:xfrm>
+            <a:off x="252000" y="374400"/>
+            <a:ext cx="1260000" cy="0"/>
+          </a:xfrm>
+          <a:prstGeom prst="line">
+            <a:avLst/>
+          </a:prstGeom>
+          <a:ln w="3600">
+            <a:solidFill>
+              <a:srgbClr val="E3E5E9"/>
+            </a:solidFill>
+          </a:ln>
+        </p:spPr>
+      </p:cxnSp>
+      <p:sp>
+        <p:nvSpPr>
+          <p:cNvPr id="8" name="텍스트"/>
           <p:cNvSpPr txBox="1"/>
           <p:nvPr/>
         </p:nvSpPr>
         <p:spPr>
           <a:xfrm>
-            <a:off x="252000" y="540000"/>
-            <a:ext cx="1584000" cy="360000"/>
+            <a:off x="252000" y="633600"/>
+            <a:ext cx="1800000" cy="237600"/>
           </a:xfrm>
           <a:prstGeom prst="rect">
             <a:avLst/>
@@ -3261,11 +3295,11 @@
           <a:p>
             <a:pPr algn="l">
               <a:lnSpc>
-                <a:spcPts val="3190"/>
+                <a:spcPts val="1957"/>
               </a:lnSpc>
             </a:pPr>
             <a:r>
-              <a:rPr sz="2200" b="1">
+              <a:rPr sz="1350" b="1" spc="120">
                 <a:solidFill>
                   <a:srgbClr val="12151C"/>
                 </a:solidFill>
@@ -3279,14 +3313,14 @@
       </p:sp>
       <p:sp>
         <p:nvSpPr>
-          <p:cNvPr id="6" name="텍스트"/>
+          <p:cNvPr id="9" name="텍스트"/>
           <p:cNvSpPr txBox="1"/>
           <p:nvPr/>
         </p:nvSpPr>
         <p:spPr>
           <a:xfrm>
-            <a:off x="252000" y="943200"/>
-            <a:ext cx="1584000" cy="171451"/>
+            <a:off x="252000" y="885600"/>
+            <a:ext cx="1800000" cy="133351"/>
           </a:xfrm>
           <a:prstGeom prst="rect">
             <a:avLst/>
@@ -3301,11 +3335,11 @@
           <a:p>
             <a:pPr algn="l">
               <a:lnSpc>
-                <a:spcPts val="1305"/>
+                <a:spcPts val="1015"/>
               </a:lnSpc>
             </a:pPr>
             <a:r>
-              <a:rPr sz="900" b="0">
+              <a:rPr sz="700" b="0" spc="60">
                 <a:solidFill>
                   <a:srgbClr val="6B7280"/>
                 </a:solidFill>
@@ -3319,14 +3353,14 @@
       </p:sp>
       <p:sp>
         <p:nvSpPr>
-          <p:cNvPr id="7" name="Rectangle 6"/>
+          <p:cNvPr id="10" name="Rectangle 9"/>
           <p:cNvSpPr/>
           <p:nvPr/>
         </p:nvSpPr>
         <p:spPr>
           <a:xfrm>
-            <a:off x="252000" y="1195200"/>
-            <a:ext cx="144000" cy="18000"/>
+            <a:off x="252000" y="1044000"/>
+            <a:ext cx="129600" cy="14400"/>
           </a:xfrm>
           <a:prstGeom prst="rect">
             <a:avLst/>
@@ -3348,14 +3382,14 @@
       </p:sp>
       <p:sp>
         <p:nvSpPr>
-          <p:cNvPr id="8" name="텍스트"/>
+          <p:cNvPr id="11" name="텍스트"/>
           <p:cNvSpPr txBox="1"/>
           <p:nvPr/>
         </p:nvSpPr>
         <p:spPr>
           <a:xfrm>
-            <a:off x="252000" y="1328400"/>
-            <a:ext cx="331200" cy="99061"/>
+            <a:off x="252000" y="1184400"/>
+            <a:ext cx="324000" cy="91441"/>
           </a:xfrm>
           <a:prstGeom prst="rect">
             <a:avLst/>
@@ -3370,11 +3404,11 @@
           <a:p>
             <a:pPr algn="l">
               <a:lnSpc>
-                <a:spcPts val="754"/>
+                <a:spcPts val="696"/>
               </a:lnSpc>
             </a:pPr>
             <a:r>
-              <a:rPr sz="520" b="1" spc="120">
+              <a:rPr sz="480" b="1" spc="140">
                 <a:solidFill>
                   <a:srgbClr val="6B7280"/>
                 </a:solidFill>
@@ -3388,14 +3422,14 @@
       </p:sp>
       <p:sp>
         <p:nvSpPr>
-          <p:cNvPr id="9" name="텍스트"/>
+          <p:cNvPr id="12" name="텍스트"/>
           <p:cNvSpPr txBox="1"/>
           <p:nvPr/>
         </p:nvSpPr>
         <p:spPr>
           <a:xfrm>
-            <a:off x="583200" y="1317600"/>
-            <a:ext cx="1188000" cy="125731"/>
+            <a:off x="576000" y="1173600"/>
+            <a:ext cx="972000" cy="120016"/>
           </a:xfrm>
           <a:prstGeom prst="rect">
             <a:avLst/>
@@ -3410,11 +3444,11 @@
           <a:p>
             <a:pPr algn="l">
               <a:lnSpc>
-                <a:spcPts val="956"/>
+                <a:spcPts val="913"/>
               </a:lnSpc>
             </a:pPr>
             <a:r>
-              <a:rPr sz="660" b="0">
+              <a:rPr sz="630" b="0">
                 <a:solidFill>
                   <a:srgbClr val="12151C"/>
                 </a:solidFill>
@@ -3428,14 +3462,14 @@
       </p:sp>
       <p:sp>
         <p:nvSpPr>
-          <p:cNvPr id="10" name="텍스트"/>
+          <p:cNvPr id="13" name="텍스트"/>
           <p:cNvSpPr txBox="1"/>
           <p:nvPr/>
         </p:nvSpPr>
         <p:spPr>
           <a:xfrm>
-            <a:off x="252000" y="1458000"/>
-            <a:ext cx="331200" cy="99061"/>
+            <a:off x="252000" y="1314000"/>
+            <a:ext cx="324000" cy="91441"/>
           </a:xfrm>
           <a:prstGeom prst="rect">
             <a:avLst/>
@@ -3450,11 +3484,11 @@
           <a:p>
             <a:pPr algn="l">
               <a:lnSpc>
-                <a:spcPts val="754"/>
+                <a:spcPts val="696"/>
               </a:lnSpc>
             </a:pPr>
             <a:r>
-              <a:rPr sz="520" b="1" spc="120">
+              <a:rPr sz="480" b="1" spc="140">
                 <a:solidFill>
                   <a:srgbClr val="6B7280"/>
                 </a:solidFill>
@@ -3468,14 +3502,14 @@
       </p:sp>
       <p:sp>
         <p:nvSpPr>
-          <p:cNvPr id="11" name="텍스트"/>
+          <p:cNvPr id="14" name="텍스트"/>
           <p:cNvSpPr txBox="1"/>
           <p:nvPr/>
         </p:nvSpPr>
         <p:spPr>
           <a:xfrm>
-            <a:off x="583200" y="1447200"/>
-            <a:ext cx="1188000" cy="125731"/>
+            <a:off x="576000" y="1303200"/>
+            <a:ext cx="972000" cy="120016"/>
           </a:xfrm>
           <a:prstGeom prst="rect">
             <a:avLst/>
@@ -3490,11 +3524,11 @@
           <a:p>
             <a:pPr algn="l">
               <a:lnSpc>
-                <a:spcPts val="956"/>
+                <a:spcPts val="913"/>
               </a:lnSpc>
             </a:pPr>
             <a:r>
-              <a:rPr sz="660" b="0">
+              <a:rPr sz="630" b="0">
                 <a:solidFill>
                   <a:srgbClr val="12151C"/>
                 </a:solidFill>
@@ -3508,14 +3542,14 @@
       </p:sp>
       <p:sp>
         <p:nvSpPr>
-          <p:cNvPr id="12" name="텍스트"/>
+          <p:cNvPr id="15" name="텍스트"/>
           <p:cNvSpPr txBox="1"/>
           <p:nvPr/>
         </p:nvSpPr>
         <p:spPr>
           <a:xfrm>
-            <a:off x="252000" y="1587600"/>
-            <a:ext cx="331200" cy="99061"/>
+            <a:off x="252000" y="1443600"/>
+            <a:ext cx="324000" cy="91441"/>
           </a:xfrm>
           <a:prstGeom prst="rect">
             <a:avLst/>
@@ -3530,11 +3564,11 @@
           <a:p>
             <a:pPr algn="l">
               <a:lnSpc>
-                <a:spcPts val="754"/>
+                <a:spcPts val="696"/>
               </a:lnSpc>
             </a:pPr>
             <a:r>
-              <a:rPr sz="520" b="1" spc="120">
+              <a:rPr sz="480" b="1" spc="140">
                 <a:solidFill>
                   <a:srgbClr val="6B7280"/>
                 </a:solidFill>
@@ -3548,14 +3582,14 @@
       </p:sp>
       <p:sp>
         <p:nvSpPr>
-          <p:cNvPr id="13" name="텍스트"/>
+          <p:cNvPr id="16" name="텍스트"/>
           <p:cNvSpPr txBox="1"/>
           <p:nvPr/>
         </p:nvSpPr>
         <p:spPr>
           <a:xfrm>
-            <a:off x="583200" y="1576800"/>
-            <a:ext cx="1188000" cy="125731"/>
+            <a:off x="576000" y="1432800"/>
+            <a:ext cx="972000" cy="120016"/>
           </a:xfrm>
           <a:prstGeom prst="rect">
             <a:avLst/>
@@ -3570,11 +3604,11 @@
           <a:p>
             <a:pPr algn="l">
               <a:lnSpc>
-                <a:spcPts val="956"/>
+                <a:spcPts val="913"/>
               </a:lnSpc>
             </a:pPr>
             <a:r>
-              <a:rPr sz="660" b="0">
+              <a:rPr sz="630" b="0">
                 <a:solidFill>
                   <a:srgbClr val="12151C"/>
                 </a:solidFill>
@@ -3612,248 +3646,184 @@
         <p:nvPr/>
       </p:nvGrpSpPr>
       <p:grpSpPr/>
-      <p:sp>
-        <p:nvSpPr>
-          <p:cNvPr id="2" name="Freeform 1"/>
-          <p:cNvSpPr/>
+      <p:cxnSp>
+        <p:nvCxnSpPr>
+          <p:cNvPr id="2" name="Connector 1"/>
+          <p:cNvCxnSpPr/>
           <p:nvPr/>
-        </p:nvSpPr>
-        <p:spPr>
-          <a:xfrm>
-            <a:off x="0" y="0"/>
-            <a:ext cx="1080000" cy="1080000"/>
-          </a:xfrm>
-          <a:custGeom>
+        </p:nvCxnSpPr>
+        <p:spPr>
+          <a:xfrm>
+            <a:off x="79200" y="108000"/>
+            <a:ext cx="57600" cy="0"/>
+          </a:xfrm>
+          <a:prstGeom prst="line">
             <a:avLst/>
-            <a:gdLst/>
-            <a:ahLst/>
-            <a:cxnLst/>
-            <a:rect l="l" t="t" r="r" b="b"/>
-            <a:pathLst>
-              <a:path w="1080000" h="1080000">
-                <a:moveTo>
-                  <a:pt x="0" y="0"/>
-                </a:moveTo>
-                <a:lnTo>
-                  <a:pt x="1080000" y="0"/>
-                </a:lnTo>
-                <a:lnTo>
-                  <a:pt x="1077688" y="70635"/>
-                </a:lnTo>
-                <a:lnTo>
-                  <a:pt x="1070760" y="140968"/>
-                </a:lnTo>
-                <a:lnTo>
-                  <a:pt x="1059248" y="210698"/>
-                </a:lnTo>
-                <a:lnTo>
-                  <a:pt x="1043200" y="279525"/>
-                </a:lnTo>
-                <a:lnTo>
-                  <a:pt x="1022685" y="347155"/>
-                </a:lnTo>
-                <a:lnTo>
-                  <a:pt x="997790" y="413298"/>
-                </a:lnTo>
-                <a:lnTo>
-                  <a:pt x="968623" y="477672"/>
-                </a:lnTo>
-                <a:lnTo>
-                  <a:pt x="935307" y="540000"/>
-                </a:lnTo>
-                <a:lnTo>
-                  <a:pt x="897987" y="600016"/>
-                </a:lnTo>
-                <a:lnTo>
-                  <a:pt x="856822" y="657462"/>
-                </a:lnTo>
-                <a:lnTo>
-                  <a:pt x="811987" y="712093"/>
-                </a:lnTo>
-                <a:lnTo>
-                  <a:pt x="763675" y="763675"/>
-                </a:lnTo>
-                <a:lnTo>
-                  <a:pt x="712093" y="811987"/>
-                </a:lnTo>
-                <a:lnTo>
-                  <a:pt x="657462" y="856822"/>
-                </a:lnTo>
-                <a:lnTo>
-                  <a:pt x="600016" y="897987"/>
-                </a:lnTo>
-                <a:lnTo>
-                  <a:pt x="540000" y="935307"/>
-                </a:lnTo>
-                <a:lnTo>
-                  <a:pt x="477672" y="968623"/>
-                </a:lnTo>
-                <a:lnTo>
-                  <a:pt x="413298" y="997790"/>
-                </a:lnTo>
-                <a:lnTo>
-                  <a:pt x="347155" y="1022685"/>
-                </a:lnTo>
-                <a:lnTo>
-                  <a:pt x="279525" y="1043200"/>
-                </a:lnTo>
-                <a:lnTo>
-                  <a:pt x="210698" y="1059248"/>
-                </a:lnTo>
-                <a:lnTo>
-                  <a:pt x="140968" y="1070760"/>
-                </a:lnTo>
-                <a:lnTo>
-                  <a:pt x="70635" y="1077688"/>
-                </a:lnTo>
-                <a:lnTo>
-                  <a:pt x="0" y="1080000"/>
-                </a:lnTo>
-                <a:close/>
-              </a:path>
-            </a:pathLst>
-          </a:custGeom>
-          <a:solidFill>
-            <a:srgbClr val="4170D4"/>
-          </a:solidFill>
-          <a:ln>
-            <a:noFill/>
+          </a:prstGeom>
+          <a:ln w="3600">
+            <a:solidFill>
+              <a:srgbClr val="2A2F38"/>
+            </a:solidFill>
           </a:ln>
         </p:spPr>
-        <p:txBody>
-          <a:bodyPr rtlCol="0" anchor="ctr"/>
-          <a:lstStyle/>
-          <a:p>
-            <a:pPr algn="ctr"/>
-          </a:p>
-        </p:txBody>
-      </p:sp>
-      <p:sp>
-        <p:nvSpPr>
-          <p:cNvPr id="3" name="Freeform 2"/>
-          <p:cNvSpPr/>
+      </p:cxnSp>
+      <p:cxnSp>
+        <p:nvCxnSpPr>
+          <p:cNvPr id="3" name="Connector 2"/>
+          <p:cNvCxnSpPr/>
           <p:nvPr/>
-        </p:nvSpPr>
-        <p:spPr>
-          <a:xfrm>
-            <a:off x="0" y="0"/>
-            <a:ext cx="684000" cy="684000"/>
-          </a:xfrm>
-          <a:custGeom>
+        </p:nvCxnSpPr>
+        <p:spPr>
+          <a:xfrm>
+            <a:off x="108000" y="79200"/>
+            <a:ext cx="0" cy="57600"/>
+          </a:xfrm>
+          <a:prstGeom prst="line">
             <a:avLst/>
-            <a:gdLst/>
-            <a:ahLst/>
-            <a:cxnLst/>
-            <a:rect l="l" t="t" r="r" b="b"/>
-            <a:pathLst>
-              <a:path w="684000" h="684000">
-                <a:moveTo>
-                  <a:pt x="0" y="0"/>
-                </a:moveTo>
-                <a:lnTo>
-                  <a:pt x="684000" y="0"/>
-                </a:lnTo>
-                <a:lnTo>
-                  <a:pt x="682536" y="44736"/>
-                </a:lnTo>
-                <a:lnTo>
-                  <a:pt x="678148" y="89280"/>
-                </a:lnTo>
-                <a:lnTo>
-                  <a:pt x="670857" y="133442"/>
-                </a:lnTo>
-                <a:lnTo>
-                  <a:pt x="660693" y="177032"/>
-                </a:lnTo>
-                <a:lnTo>
-                  <a:pt x="647700" y="219865"/>
-                </a:lnTo>
-                <a:lnTo>
-                  <a:pt x="631934" y="261755"/>
-                </a:lnTo>
-                <a:lnTo>
-                  <a:pt x="613461" y="302525"/>
-                </a:lnTo>
-                <a:lnTo>
-                  <a:pt x="592361" y="342000"/>
-                </a:lnTo>
-                <a:lnTo>
-                  <a:pt x="568725" y="380010"/>
-                </a:lnTo>
-                <a:lnTo>
-                  <a:pt x="542654" y="416393"/>
-                </a:lnTo>
-                <a:lnTo>
-                  <a:pt x="514258" y="450993"/>
-                </a:lnTo>
-                <a:lnTo>
-                  <a:pt x="483661" y="483661"/>
-                </a:lnTo>
-                <a:lnTo>
-                  <a:pt x="450993" y="514258"/>
-                </a:lnTo>
-                <a:lnTo>
-                  <a:pt x="416393" y="542654"/>
-                </a:lnTo>
-                <a:lnTo>
-                  <a:pt x="380010" y="568725"/>
-                </a:lnTo>
-                <a:lnTo>
-                  <a:pt x="342000" y="592361"/>
-                </a:lnTo>
-                <a:lnTo>
-                  <a:pt x="302525" y="613461"/>
-                </a:lnTo>
-                <a:lnTo>
-                  <a:pt x="261755" y="631934"/>
-                </a:lnTo>
-                <a:lnTo>
-                  <a:pt x="219865" y="647700"/>
-                </a:lnTo>
-                <a:lnTo>
-                  <a:pt x="177032" y="660693"/>
-                </a:lnTo>
-                <a:lnTo>
-                  <a:pt x="133442" y="670857"/>
-                </a:lnTo>
-                <a:lnTo>
-                  <a:pt x="89280" y="678148"/>
-                </a:lnTo>
-                <a:lnTo>
-                  <a:pt x="44736" y="682536"/>
-                </a:lnTo>
-                <a:lnTo>
-                  <a:pt x="0" y="684000"/>
-                </a:lnTo>
-                <a:close/>
-              </a:path>
-            </a:pathLst>
-          </a:custGeom>
-          <a:solidFill>
-            <a:srgbClr val="26292D"/>
-          </a:solidFill>
-          <a:ln>
-            <a:noFill/>
+          </a:prstGeom>
+          <a:ln w="3600">
+            <a:solidFill>
+              <a:srgbClr val="2A2F38"/>
+            </a:solidFill>
           </a:ln>
         </p:spPr>
-        <p:txBody>
-          <a:bodyPr rtlCol="0" anchor="ctr"/>
-          <a:lstStyle/>
-          <a:p>
-            <a:pPr algn="ctr"/>
-          </a:p>
-        </p:txBody>
-      </p:sp>
-      <p:sp>
-        <p:nvSpPr>
-          <p:cNvPr id="4" name="텍스트"/>
+      </p:cxnSp>
+      <p:cxnSp>
+        <p:nvCxnSpPr>
+          <p:cNvPr id="4" name="Connector 3"/>
+          <p:cNvCxnSpPr/>
+          <p:nvPr/>
+        </p:nvCxnSpPr>
+        <p:spPr>
+          <a:xfrm>
+            <a:off x="3103200" y="108000"/>
+            <a:ext cx="57600" cy="0"/>
+          </a:xfrm>
+          <a:prstGeom prst="line">
+            <a:avLst/>
+          </a:prstGeom>
+          <a:ln w="3600">
+            <a:solidFill>
+              <a:srgbClr val="2A2F38"/>
+            </a:solidFill>
+          </a:ln>
+        </p:spPr>
+      </p:cxnSp>
+      <p:cxnSp>
+        <p:nvCxnSpPr>
+          <p:cNvPr id="5" name="Connector 4"/>
+          <p:cNvCxnSpPr/>
+          <p:nvPr/>
+        </p:nvCxnSpPr>
+        <p:spPr>
+          <a:xfrm>
+            <a:off x="3132000" y="79200"/>
+            <a:ext cx="0" cy="57600"/>
+          </a:xfrm>
+          <a:prstGeom prst="line">
+            <a:avLst/>
+          </a:prstGeom>
+          <a:ln w="3600">
+            <a:solidFill>
+              <a:srgbClr val="2A2F38"/>
+            </a:solidFill>
+          </a:ln>
+        </p:spPr>
+      </p:cxnSp>
+      <p:cxnSp>
+        <p:nvCxnSpPr>
+          <p:cNvPr id="6" name="Connector 5"/>
+          <p:cNvCxnSpPr/>
+          <p:nvPr/>
+        </p:nvCxnSpPr>
+        <p:spPr>
+          <a:xfrm>
+            <a:off x="79200" y="1692000"/>
+            <a:ext cx="57600" cy="0"/>
+          </a:xfrm>
+          <a:prstGeom prst="line">
+            <a:avLst/>
+          </a:prstGeom>
+          <a:ln w="3600">
+            <a:solidFill>
+              <a:srgbClr val="2A2F38"/>
+            </a:solidFill>
+          </a:ln>
+        </p:spPr>
+      </p:cxnSp>
+      <p:cxnSp>
+        <p:nvCxnSpPr>
+          <p:cNvPr id="7" name="Connector 6"/>
+          <p:cNvCxnSpPr/>
+          <p:nvPr/>
+        </p:nvCxnSpPr>
+        <p:spPr>
+          <a:xfrm>
+            <a:off x="108000" y="1663200"/>
+            <a:ext cx="0" cy="57600"/>
+          </a:xfrm>
+          <a:prstGeom prst="line">
+            <a:avLst/>
+          </a:prstGeom>
+          <a:ln w="3600">
+            <a:solidFill>
+              <a:srgbClr val="2A2F38"/>
+            </a:solidFill>
+          </a:ln>
+        </p:spPr>
+      </p:cxnSp>
+      <p:cxnSp>
+        <p:nvCxnSpPr>
+          <p:cNvPr id="8" name="Connector 7"/>
+          <p:cNvCxnSpPr/>
+          <p:nvPr/>
+        </p:nvCxnSpPr>
+        <p:spPr>
+          <a:xfrm>
+            <a:off x="3103200" y="1692000"/>
+            <a:ext cx="57600" cy="0"/>
+          </a:xfrm>
+          <a:prstGeom prst="line">
+            <a:avLst/>
+          </a:prstGeom>
+          <a:ln w="3600">
+            <a:solidFill>
+              <a:srgbClr val="2A2F38"/>
+            </a:solidFill>
+          </a:ln>
+        </p:spPr>
+      </p:cxnSp>
+      <p:cxnSp>
+        <p:nvCxnSpPr>
+          <p:cNvPr id="9" name="Connector 8"/>
+          <p:cNvCxnSpPr/>
+          <p:nvPr/>
+        </p:nvCxnSpPr>
+        <p:spPr>
+          <a:xfrm>
+            <a:off x="3132000" y="1663200"/>
+            <a:ext cx="0" cy="57600"/>
+          </a:xfrm>
+          <a:prstGeom prst="line">
+            <a:avLst/>
+          </a:prstGeom>
+          <a:ln w="3600">
+            <a:solidFill>
+              <a:srgbClr val="2A2F38"/>
+            </a:solidFill>
+          </a:ln>
+        </p:spPr>
+      </p:cxnSp>
+      <p:sp>
+        <p:nvSpPr>
+          <p:cNvPr id="10" name="텍스트"/>
           <p:cNvSpPr txBox="1"/>
           <p:nvPr/>
         </p:nvSpPr>
         <p:spPr>
           <a:xfrm>
-            <a:off x="1188000" y="1044000"/>
-            <a:ext cx="1800000" cy="432000"/>
+            <a:off x="252000" y="288000"/>
+            <a:ext cx="2520000" cy="123826"/>
           </a:xfrm>
           <a:prstGeom prst="rect">
             <a:avLst/>
@@ -3866,70 +3836,13 @@
           </a:bodyPr>
           <a:lstStyle/>
           <a:p>
-            <a:pPr algn="r">
-              <a:lnSpc>
-                <a:spcPts val="1739"/>
-              </a:lnSpc>
-            </a:pPr>
-            <a:r>
-              <a:rPr sz="1200" b="1">
-                <a:solidFill>
-                  <a:srgbClr val="FFFFFF"/>
-                </a:solidFill>
-                <a:latin typeface="맑은 고딕"/>
-                <a:ea typeface="맑은 고딕"/>
-              </a:rPr>
-              <a:t>공정과 상식을</a:t>
-            </a:r>
-          </a:p>
-          <a:p>
-            <a:pPr algn="r">
-              <a:lnSpc>
-                <a:spcPts val="1739"/>
-              </a:lnSpc>
-            </a:pPr>
-            <a:r>
-              <a:rPr sz="1200" b="1">
-                <a:solidFill>
-                  <a:srgbClr val="FFFFFF"/>
-                </a:solidFill>
-                <a:latin typeface="맑은 고딕"/>
-                <a:ea typeface="맑은 고딕"/>
-              </a:rPr>
-              <a:t>지키겠습니다</a:t>
-            </a:r>
-          </a:p>
-        </p:txBody>
-      </p:sp>
-      <p:sp>
-        <p:nvSpPr>
-          <p:cNvPr id="5" name="텍스트"/>
-          <p:cNvSpPr txBox="1"/>
-          <p:nvPr/>
-        </p:nvSpPr>
-        <p:spPr>
-          <a:xfrm>
-            <a:off x="1188000" y="1526400"/>
-            <a:ext cx="1800000" cy="123826"/>
-          </a:xfrm>
-          <a:prstGeom prst="rect">
-            <a:avLst/>
-          </a:prstGeom>
-          <a:noFill/>
-        </p:spPr>
-        <p:txBody>
-          <a:bodyPr wrap="square" lIns="0" rIns="0" tIns="0" bIns="0" anchor="t">
-            <a:spAutoFit/>
-          </a:bodyPr>
-          <a:lstStyle/>
-          <a:p>
-            <a:pPr algn="r">
+            <a:pPr algn="ctr">
               <a:lnSpc>
                 <a:spcPts val="942"/>
               </a:lnSpc>
             </a:pPr>
             <a:r>
-              <a:rPr sz="650" b="1" spc="200">
+              <a:rPr sz="650" b="1" spc="220">
                 <a:solidFill>
                   <a:srgbClr val="A3A9B5"/>
                 </a:solidFill>
@@ -3937,6 +3850,237 @@
                 <a:ea typeface="맑은 고딕"/>
               </a:rPr>
               <a:t>기관명 · 부서명</a:t>
+            </a:r>
+          </a:p>
+        </p:txBody>
+      </p:sp>
+      <p:sp>
+        <p:nvSpPr>
+          <p:cNvPr id="11" name="Rectangle 10"/>
+          <p:cNvSpPr/>
+          <p:nvPr/>
+        </p:nvSpPr>
+        <p:spPr>
+          <a:xfrm>
+            <a:off x="1530000" y="453600"/>
+            <a:ext cx="180000" cy="14400"/>
+          </a:xfrm>
+          <a:prstGeom prst="rect">
+            <a:avLst/>
+          </a:prstGeom>
+          <a:solidFill>
+            <a:srgbClr val="4170D4"/>
+          </a:solidFill>
+          <a:ln>
+            <a:noFill/>
+          </a:ln>
+        </p:spPr>
+        <p:txBody>
+          <a:bodyPr rtlCol="0" anchor="ctr"/>
+          <a:lstStyle/>
+          <a:p>
+            <a:pPr algn="ctr"/>
+          </a:p>
+        </p:txBody>
+      </p:sp>
+      <p:sp>
+        <p:nvSpPr>
+          <p:cNvPr id="12" name="텍스트"/>
+          <p:cNvSpPr txBox="1"/>
+          <p:nvPr/>
+        </p:nvSpPr>
+        <p:spPr>
+          <a:xfrm>
+            <a:off x="360000" y="619200"/>
+            <a:ext cx="2520000" cy="99061"/>
+          </a:xfrm>
+          <a:prstGeom prst="rect">
+            <a:avLst/>
+          </a:prstGeom>
+          <a:noFill/>
+        </p:spPr>
+        <p:txBody>
+          <a:bodyPr wrap="square" lIns="0" rIns="0" tIns="0" bIns="0" anchor="t">
+            <a:spAutoFit/>
+          </a:bodyPr>
+          <a:lstStyle/>
+          <a:p>
+            <a:pPr algn="ctr">
+              <a:lnSpc>
+                <a:spcPts val="754"/>
+              </a:lnSpc>
+            </a:pPr>
+            <a:r>
+              <a:rPr sz="520" b="1" spc="240">
+                <a:solidFill>
+                  <a:srgbClr val="A3A9B5"/>
+                </a:solidFill>
+                <a:latin typeface="맑은 고딕"/>
+                <a:ea typeface="맑은 고딕"/>
+              </a:rPr>
+              <a:t>담당 업무</a:t>
+            </a:r>
+          </a:p>
+        </p:txBody>
+      </p:sp>
+      <p:sp>
+        <p:nvSpPr>
+          <p:cNvPr id="13" name="텍스트"/>
+          <p:cNvSpPr txBox="1"/>
+          <p:nvPr/>
+        </p:nvSpPr>
+        <p:spPr>
+          <a:xfrm>
+            <a:off x="360000" y="741600"/>
+            <a:ext cx="2520000" cy="396000"/>
+          </a:xfrm>
+          <a:prstGeom prst="rect">
+            <a:avLst/>
+          </a:prstGeom>
+          <a:noFill/>
+        </p:spPr>
+        <p:txBody>
+          <a:bodyPr wrap="square" lIns="0" rIns="0" tIns="0" bIns="0" anchor="t">
+            <a:spAutoFit/>
+          </a:bodyPr>
+          <a:lstStyle/>
+          <a:p>
+            <a:pPr algn="ctr">
+              <a:lnSpc>
+                <a:spcPts val="1188"/>
+              </a:lnSpc>
+            </a:pPr>
+            <a:r>
+              <a:rPr sz="819" b="1">
+                <a:solidFill>
+                  <a:srgbClr val="FFFFFF"/>
+                </a:solidFill>
+                <a:latin typeface="맑은 고딕"/>
+                <a:ea typeface="맑은 고딕"/>
+              </a:rPr>
+              <a:t>환경 관리  ·  세무 안내  ·  허가 · 신고</a:t>
+            </a:r>
+          </a:p>
+        </p:txBody>
+      </p:sp>
+      <p:cxnSp>
+        <p:nvCxnSpPr>
+          <p:cNvPr id="14" name="Connector 13"/>
+          <p:cNvCxnSpPr/>
+          <p:nvPr/>
+        </p:nvCxnSpPr>
+        <p:spPr>
+          <a:xfrm>
+            <a:off x="360000" y="1224000"/>
+            <a:ext cx="2520000" cy="0"/>
+          </a:xfrm>
+          <a:prstGeom prst="line">
+            <a:avLst/>
+          </a:prstGeom>
+          <a:ln w="3600">
+            <a:solidFill>
+              <a:srgbClr val="2A2F38"/>
+            </a:solidFill>
+          </a:ln>
+        </p:spPr>
+      </p:cxnSp>
+      <p:sp>
+        <p:nvSpPr>
+          <p:cNvPr id="15" name="텍스트"/>
+          <p:cNvSpPr txBox="1"/>
+          <p:nvPr/>
+        </p:nvSpPr>
+        <p:spPr>
+          <a:xfrm>
+            <a:off x="360000" y="1317600"/>
+            <a:ext cx="1224000" cy="118111"/>
+          </a:xfrm>
+          <a:prstGeom prst="rect">
+            <a:avLst/>
+          </a:prstGeom>
+          <a:noFill/>
+        </p:spPr>
+        <p:txBody>
+          <a:bodyPr wrap="square" lIns="0" rIns="0" tIns="0" bIns="0" anchor="t">
+            <a:spAutoFit/>
+          </a:bodyPr>
+          <a:lstStyle/>
+          <a:p>
+            <a:pPr algn="ctr">
+              <a:lnSpc>
+                <a:spcPts val="899"/>
+              </a:lnSpc>
+            </a:pPr>
+            <a:r>
+              <a:rPr sz="620" b="0">
+                <a:solidFill>
+                  <a:srgbClr val="FFFFFF"/>
+                </a:solidFill>
+                <a:latin typeface="맑은 고딕"/>
+                <a:ea typeface="맑은 고딕"/>
+              </a:rPr>
+              <a:t>평일 09:00 – 17:30</a:t>
+            </a:r>
+          </a:p>
+        </p:txBody>
+      </p:sp>
+      <p:cxnSp>
+        <p:nvCxnSpPr>
+          <p:cNvPr id="16" name="Connector 15"/>
+          <p:cNvCxnSpPr/>
+          <p:nvPr/>
+        </p:nvCxnSpPr>
+        <p:spPr>
+          <a:xfrm>
+            <a:off x="1620000" y="1296000"/>
+            <a:ext cx="0" cy="180000"/>
+          </a:xfrm>
+          <a:prstGeom prst="line">
+            <a:avLst/>
+          </a:prstGeom>
+          <a:ln w="3600">
+            <a:solidFill>
+              <a:srgbClr val="2A2F38"/>
+            </a:solidFill>
+          </a:ln>
+        </p:spPr>
+      </p:cxnSp>
+      <p:sp>
+        <p:nvSpPr>
+          <p:cNvPr id="17" name="텍스트"/>
+          <p:cNvSpPr txBox="1"/>
+          <p:nvPr/>
+        </p:nvSpPr>
+        <p:spPr>
+          <a:xfrm>
+            <a:off x="1656000" y="1317600"/>
+            <a:ext cx="1224000" cy="118111"/>
+          </a:xfrm>
+          <a:prstGeom prst="rect">
+            <a:avLst/>
+          </a:prstGeom>
+          <a:noFill/>
+        </p:spPr>
+        <p:txBody>
+          <a:bodyPr wrap="square" lIns="0" rIns="0" tIns="0" bIns="0" anchor="t">
+            <a:spAutoFit/>
+          </a:bodyPr>
+          <a:lstStyle/>
+          <a:p>
+            <a:pPr algn="ctr">
+              <a:lnSpc>
+                <a:spcPts val="899"/>
+              </a:lnSpc>
+            </a:pPr>
+            <a:r>
+              <a:rPr sz="620" b="0">
+                <a:solidFill>
+                  <a:srgbClr val="FFFFFF"/>
+                </a:solidFill>
+                <a:latin typeface="맑은 고딕"/>
+                <a:ea typeface="맑은 고딕"/>
+              </a:rPr>
+              <a:t>www.example.com</a:t>
             </a:r>
           </a:p>
         </p:txBody>
